--- a/planering/biologi-omrade3/biologi-3-1-mangfald-hot-och-ekosystemtjanster.pptx
+++ b/planering/biologi-omrade3/biologi-3-1-mangfald-hot-och-ekosystemtjanster.pptx
@@ -122,12 +122,12 @@
   <p:extLst>
     <p:ext uri="{521415D9-36F7-43E2-AB2F-B90AF26B5E84}">
       <p14:sectionLst xmlns:p14="http://schemas.microsoft.com/office/powerpoint/2010/main">
-        <p14:section name="Start" id="{424eff2f-7a39-f9e3-7e47-b53500041990}">
+        <p14:section name="Start" id="{77424d96-2593-ff99-8c88-63f50c2fa390}">
           <p14:sldIdLst>
             <p14:sldId id="256"/>
           </p14:sldIdLst>
         </p14:section>
-        <p14:section name="Gener, arter och ekosystem" id="{f99128e7-2a41-b567-1ecc-039eec46965e}">
+        <p14:section name="Gener, arter och ekosystem" id="{63faf85d-09dd-21c4-2dd5-4f32fb28d7c9}">
           <p14:sldIdLst>
             <p14:sldId id="257"/>
             <p14:sldId id="258"/>
@@ -135,7 +135,7 @@
             <p14:sldId id="260"/>
           </p14:sldIdLst>
         </p14:section>
-        <p14:section name="Ekosystemtjänster" id="{b52db3a4-f2b3-8b63-e650-7f5a16f1480b}">
+        <p14:section name="Ekosystemtjänster" id="{3bce8fb3-072a-1979-6bb6-3e1cfaff8d25}">
           <p14:sldIdLst>
             <p14:sldId id="261"/>
             <p14:sldId id="262"/>
@@ -143,7 +143,7 @@
             <p14:sldId id="264"/>
           </p14:sldIdLst>
         </p14:section>
-        <p14:section name="Hoten mot mångfalden" id="{f9b13cb3-790d-fc70-9124-fb6f32a7688c}">
+        <p14:section name="Hoten mot mångfalden" id="{83d794f2-3e00-2363-9dce-c08f4c51c21d}">
           <p14:sldIdLst>
             <p14:sldId id="265"/>
             <p14:sldId id="266"/>
@@ -152,7 +152,7 @@
             <p14:sldId id="269"/>
           </p14:sldIdLst>
         </p14:section>
-        <p14:section name="Labb 3.1 Artinventering i en provruta" id="{3ffe12ba-e7c5-39e4-6320-f525812c8c48}">
+        <p14:section name="Labb 3.1 Artinventering i en provruta" id="{cf85eeb8-754a-9e35-3c55-9311b87cea59}">
           <p14:sldIdLst>
             <p14:sldId id="270"/>
             <p14:sldId id="271"/>
@@ -3825,7 +3825,7 @@
         <p:spPr>
           <a:xfrm>
             <a:off x="548640" y="1554480"/>
-            <a:ext cx="4782312" cy="4480560"/>
+            <a:ext cx="3593592" cy="4480560"/>
           </a:xfrm>
           <a:prstGeom prst="rect">
             <a:avLst/>
@@ -3845,14 +3845,14 @@
               <a:buChar char="•"/>
             </a:pPr>
             <a:r>
-              <a:rPr lang="en-US" sz="2200" dirty="0">
+              <a:rPr lang="en-US" sz="2000" dirty="0">
                 <a:solidFill>
                   <a:schemeClr val="tx1"/>
                 </a:solidFill>
               </a:rPr>
               <a:t>Antal rödlistade arter i Sverige.</a:t>
             </a:r>
-            <a:endParaRPr lang="en-US" sz="2200" dirty="0"/>
+            <a:endParaRPr lang="en-US" sz="2000" dirty="0"/>
           </a:p>
           <a:p>
             <a:pPr marL="342900" indent="-342900">
@@ -3863,14 +3863,14 @@
               <a:buChar char="•"/>
             </a:pPr>
             <a:r>
-              <a:rPr lang="en-US" sz="2200" dirty="0">
+              <a:rPr lang="en-US" sz="2000" dirty="0">
                 <a:solidFill>
                   <a:schemeClr val="tx1"/>
                 </a:solidFill>
               </a:rPr>
-              <a:t>År 2025: 23 103 bedömda, 5 217 rödlistade och 2 373 hotade.</a:t>
-            </a:r>
-            <a:endParaRPr lang="en-US" sz="2200" dirty="0"/>
+              <a:t>Rödlistan 2025: 23 103 bedömda, 5 217 rödlistade och 2 373 hotade.</a:t>
+            </a:r>
+            <a:endParaRPr lang="en-US" sz="2000" dirty="0"/>
           </a:p>
           <a:p>
             <a:pPr marL="342900" indent="-342900">
@@ -3881,14 +3881,14 @@
               <a:buChar char="•"/>
             </a:pPr>
             <a:r>
-              <a:rPr lang="en-US" sz="2200" dirty="0">
+              <a:rPr lang="en-US" sz="2000" dirty="0">
                 <a:solidFill>
                   <a:schemeClr val="tx1"/>
                 </a:solidFill>
               </a:rPr>
               <a:t>Granska kritiskt: fler bedömda arter ger fler rödlistade.</a:t>
             </a:r>
-            <a:endParaRPr lang="en-US" sz="2200" dirty="0"/>
+            <a:endParaRPr lang="en-US" sz="2000" dirty="0"/>
           </a:p>
         </p:txBody>
       </p:sp>
@@ -3908,8 +3908,8 @@
         </p:blipFill>
         <p:spPr>
           <a:xfrm>
-            <a:off x="5788152" y="2078654"/>
-            <a:ext cx="5852160" cy="3432213"/>
+            <a:off x="4599432" y="1730070"/>
+            <a:ext cx="7040880" cy="4129381"/>
           </a:xfrm>
           <a:prstGeom prst="rect">
             <a:avLst/>
@@ -4033,7 +4033,7 @@
         <p:spPr>
           <a:xfrm>
             <a:off x="548640" y="1554480"/>
-            <a:ext cx="4782312" cy="4480560"/>
+            <a:ext cx="3593592" cy="4480560"/>
           </a:xfrm>
           <a:prstGeom prst="rect">
             <a:avLst/>
@@ -4053,14 +4053,14 @@
               <a:buChar char="•"/>
             </a:pPr>
             <a:r>
-              <a:rPr lang="en-US" sz="2200" dirty="0">
+              <a:rPr lang="en-US" sz="2000" dirty="0">
                 <a:solidFill>
                   <a:schemeClr val="tx1"/>
                 </a:solidFill>
               </a:rPr>
               <a:t>Fjällräven fridlystes 1928.</a:t>
             </a:r>
-            <a:endParaRPr lang="en-US" sz="2200" dirty="0"/>
+            <a:endParaRPr lang="en-US" sz="2000" dirty="0"/>
           </a:p>
           <a:p>
             <a:pPr marL="342900" indent="-342900">
@@ -4071,14 +4071,14 @@
               <a:buChar char="•"/>
             </a:pPr>
             <a:r>
-              <a:rPr lang="en-US" sz="2200" dirty="0">
+              <a:rPr lang="en-US" sz="2000" dirty="0">
                 <a:solidFill>
                   <a:schemeClr val="tx1"/>
                 </a:solidFill>
               </a:rPr>
               <a:t>Runt år 2000 fanns cirka 35–50 vuxna.</a:t>
             </a:r>
-            <a:endParaRPr lang="en-US" sz="2200" dirty="0"/>
+            <a:endParaRPr lang="en-US" sz="2000" dirty="0"/>
           </a:p>
           <a:p>
             <a:pPr marL="342900" indent="-342900">
@@ -4089,14 +4089,14 @@
               <a:buChar char="•"/>
             </a:pPr>
             <a:r>
-              <a:rPr lang="en-US" sz="2200" dirty="0">
+              <a:rPr lang="en-US" sz="2000" dirty="0">
                 <a:solidFill>
                   <a:schemeClr val="tx1"/>
                 </a:solidFill>
               </a:rPr>
               <a:t>Rödräven konkurrerar om mat och lyor.</a:t>
             </a:r>
-            <a:endParaRPr lang="en-US" sz="2200" dirty="0"/>
+            <a:endParaRPr lang="en-US" sz="2000" dirty="0"/>
           </a:p>
           <a:p>
             <a:pPr marL="342900" indent="-342900">
@@ -4107,14 +4107,14 @@
               <a:buChar char="•"/>
             </a:pPr>
             <a:r>
-              <a:rPr lang="en-US" sz="2200" dirty="0">
+              <a:rPr lang="en-US" sz="2000" dirty="0">
                 <a:solidFill>
                   <a:schemeClr val="tx1"/>
                 </a:solidFill>
               </a:rPr>
               <a:t>Garnlav är en signalart för gammal skog.</a:t>
             </a:r>
-            <a:endParaRPr lang="en-US" sz="2200" dirty="0"/>
+            <a:endParaRPr lang="en-US" sz="2000" dirty="0"/>
           </a:p>
         </p:txBody>
       </p:sp>
@@ -4134,8 +4134,8 @@
         </p:blipFill>
         <p:spPr>
           <a:xfrm>
-            <a:off x="5788152" y="2118656"/>
-            <a:ext cx="5852160" cy="3352208"/>
+            <a:off x="4599432" y="1778197"/>
+            <a:ext cx="7040880" cy="4033125"/>
           </a:xfrm>
           <a:prstGeom prst="rect">
             <a:avLst/>
@@ -4629,7 +4629,7 @@
         <p:spPr>
           <a:xfrm>
             <a:off x="548640" y="1554480"/>
-            <a:ext cx="4782312" cy="4480560"/>
+            <a:ext cx="3593592" cy="4480560"/>
           </a:xfrm>
           <a:prstGeom prst="rect">
             <a:avLst/>
@@ -4649,14 +4649,14 @@
               <a:buChar char="•"/>
             </a:pPr>
             <a:r>
-              <a:rPr lang="en-US" sz="2200" dirty="0">
+              <a:rPr lang="en-US" sz="2000" dirty="0">
                 <a:solidFill>
                   <a:schemeClr val="tx1"/>
                 </a:solidFill>
               </a:rPr>
               <a:t>Märk ut en ruta på 1 × 1 meter.</a:t>
             </a:r>
-            <a:endParaRPr lang="en-US" sz="2200" dirty="0"/>
+            <a:endParaRPr lang="en-US" sz="2000" dirty="0"/>
           </a:p>
           <a:p>
             <a:pPr marL="342900" indent="-342900">
@@ -4667,14 +4667,14 @@
               <a:buChar char="•"/>
             </a:pPr>
             <a:r>
-              <a:rPr lang="en-US" sz="2200" dirty="0">
+              <a:rPr lang="en-US" sz="2000" dirty="0">
                 <a:solidFill>
                   <a:schemeClr val="tx1"/>
                 </a:solidFill>
               </a:rPr>
               <a:t>Räkna växtarter. Ta bilder och numrera.</a:t>
             </a:r>
-            <a:endParaRPr lang="en-US" sz="2200" dirty="0"/>
+            <a:endParaRPr lang="en-US" sz="2000" dirty="0"/>
           </a:p>
           <a:p>
             <a:pPr marL="342900" indent="-342900">
@@ -4685,14 +4685,14 @@
               <a:buChar char="•"/>
             </a:pPr>
             <a:r>
-              <a:rPr lang="en-US" sz="2200" dirty="0">
+              <a:rPr lang="en-US" sz="2000" dirty="0">
                 <a:solidFill>
                   <a:schemeClr val="tx1"/>
                 </a:solidFill>
               </a:rPr>
               <a:t>Gör tre rutor på varje plats.</a:t>
             </a:r>
-            <a:endParaRPr lang="en-US" sz="2200" dirty="0"/>
+            <a:endParaRPr lang="en-US" sz="2000" dirty="0"/>
           </a:p>
           <a:p>
             <a:pPr marL="342900" indent="-342900">
@@ -4703,14 +4703,14 @@
               <a:buChar char="•"/>
             </a:pPr>
             <a:r>
-              <a:rPr lang="en-US" sz="2200" dirty="0">
+              <a:rPr lang="en-US" sz="2000" dirty="0">
                 <a:solidFill>
                   <a:schemeClr val="tx1"/>
                 </a:solidFill>
               </a:rPr>
               <a:t>Räkna medelvärde för äng och gräsmatta.</a:t>
             </a:r>
-            <a:endParaRPr lang="en-US" sz="2200" dirty="0"/>
+            <a:endParaRPr lang="en-US" sz="2000" dirty="0"/>
           </a:p>
         </p:txBody>
       </p:sp>
@@ -4730,8 +4730,8 @@
         </p:blipFill>
         <p:spPr>
           <a:xfrm>
-            <a:off x="5788152" y="1670346"/>
-            <a:ext cx="5852160" cy="4248828"/>
+            <a:off x="5034203" y="1554480"/>
+            <a:ext cx="6171337" cy="4480560"/>
           </a:xfrm>
           <a:prstGeom prst="rect">
             <a:avLst/>
@@ -4956,7 +4956,7 @@
         <p:spPr>
           <a:xfrm>
             <a:off x="548640" y="1554480"/>
-            <a:ext cx="4782312" cy="4480560"/>
+            <a:ext cx="3593592" cy="4480560"/>
           </a:xfrm>
           <a:prstGeom prst="rect">
             <a:avLst/>
@@ -4976,14 +4976,14 @@
               <a:buChar char="•"/>
             </a:pPr>
             <a:r>
-              <a:rPr lang="en-US" sz="2200" dirty="0">
+              <a:rPr lang="en-US" sz="2000" dirty="0">
                 <a:solidFill>
                   <a:schemeClr val="tx1"/>
                 </a:solidFill>
               </a:rPr>
               <a:t>Gener: variation inom en art.</a:t>
             </a:r>
-            <a:endParaRPr lang="en-US" sz="2200" dirty="0"/>
+            <a:endParaRPr lang="en-US" sz="2000" dirty="0"/>
           </a:p>
           <a:p>
             <a:pPr marL="342900" indent="-342900">
@@ -4994,14 +4994,14 @@
               <a:buChar char="•"/>
             </a:pPr>
             <a:r>
-              <a:rPr lang="en-US" sz="2200" dirty="0">
+              <a:rPr lang="en-US" sz="2000" dirty="0">
                 <a:solidFill>
                   <a:schemeClr val="tx1"/>
                 </a:solidFill>
               </a:rPr>
               <a:t>Arter: variation mellan arter.</a:t>
             </a:r>
-            <a:endParaRPr lang="en-US" sz="2200" dirty="0"/>
+            <a:endParaRPr lang="en-US" sz="2000" dirty="0"/>
           </a:p>
           <a:p>
             <a:pPr marL="342900" indent="-342900">
@@ -5012,14 +5012,14 @@
               <a:buChar char="•"/>
             </a:pPr>
             <a:r>
-              <a:rPr lang="en-US" sz="2200" dirty="0">
+              <a:rPr lang="en-US" sz="2000" dirty="0">
                 <a:solidFill>
                   <a:schemeClr val="tx1"/>
                 </a:solidFill>
               </a:rPr>
               <a:t>Ekosystem: variation mellan livsmiljöer.</a:t>
             </a:r>
-            <a:endParaRPr lang="en-US" sz="2200" dirty="0"/>
+            <a:endParaRPr lang="en-US" sz="2000" dirty="0"/>
           </a:p>
           <a:p>
             <a:pPr marL="342900" indent="-342900">
@@ -5030,14 +5030,14 @@
               <a:buChar char="•"/>
             </a:pPr>
             <a:r>
-              <a:rPr lang="en-US" sz="2200" dirty="0">
+              <a:rPr lang="en-US" sz="2000" dirty="0">
                 <a:solidFill>
                   <a:schemeClr val="tx1"/>
                 </a:solidFill>
               </a:rPr>
               <a:t>Alla tre är viktiga och påverkar varandra.</a:t>
             </a:r>
-            <a:endParaRPr lang="en-US" sz="2200" dirty="0"/>
+            <a:endParaRPr lang="en-US" sz="2000" dirty="0"/>
           </a:p>
         </p:txBody>
       </p:sp>
@@ -5057,8 +5057,8 @@
         </p:blipFill>
         <p:spPr>
           <a:xfrm>
-            <a:off x="5788152" y="2642243"/>
-            <a:ext cx="5852160" cy="2305034"/>
+            <a:off x="4599432" y="2408138"/>
+            <a:ext cx="7040880" cy="2773245"/>
           </a:xfrm>
           <a:prstGeom prst="rect">
             <a:avLst/>
@@ -5182,7 +5182,7 @@
         <p:spPr>
           <a:xfrm>
             <a:off x="548640" y="1554480"/>
-            <a:ext cx="4782312" cy="4480560"/>
+            <a:ext cx="3593592" cy="4480560"/>
           </a:xfrm>
           <a:prstGeom prst="rect">
             <a:avLst/>
@@ -5202,14 +5202,14 @@
               <a:buChar char="•"/>
             </a:pPr>
             <a:r>
-              <a:rPr lang="en-US" sz="2200" dirty="0">
+              <a:rPr lang="en-US" sz="2000" dirty="0">
                 <a:solidFill>
                   <a:schemeClr val="tx1"/>
                 </a:solidFill>
               </a:rPr>
               <a:t>Producenter, konsumenter och nedbrytare.</a:t>
             </a:r>
-            <a:endParaRPr lang="en-US" sz="2200" dirty="0"/>
+            <a:endParaRPr lang="en-US" sz="2000" dirty="0"/>
           </a:p>
           <a:p>
             <a:pPr marL="342900" indent="-342900">
@@ -5220,14 +5220,14 @@
               <a:buChar char="•"/>
             </a:pPr>
             <a:r>
-              <a:rPr lang="en-US" sz="2200" dirty="0">
+              <a:rPr lang="en-US" sz="2000" dirty="0">
                 <a:solidFill>
                   <a:schemeClr val="tx1"/>
                 </a:solidFill>
               </a:rPr>
               <a:t>Pilarna visar åt vilket håll energin går.</a:t>
             </a:r>
-            <a:endParaRPr lang="en-US" sz="2200" dirty="0"/>
+            <a:endParaRPr lang="en-US" sz="2000" dirty="0"/>
           </a:p>
           <a:p>
             <a:pPr marL="342900" indent="-342900">
@@ -5238,14 +5238,14 @@
               <a:buChar char="•"/>
             </a:pPr>
             <a:r>
-              <a:rPr lang="en-US" sz="2200" dirty="0">
+              <a:rPr lang="en-US" sz="2000" dirty="0">
                 <a:solidFill>
                   <a:schemeClr val="tx1"/>
                 </a:solidFill>
               </a:rPr>
               <a:t>Många arter ger fler reservdelar.</a:t>
             </a:r>
-            <a:endParaRPr lang="en-US" sz="2200" dirty="0"/>
+            <a:endParaRPr lang="en-US" sz="2000" dirty="0"/>
           </a:p>
           <a:p>
             <a:pPr marL="342900" indent="-342900">
@@ -5256,14 +5256,14 @@
               <a:buChar char="•"/>
             </a:pPr>
             <a:r>
-              <a:rPr lang="en-US" sz="2200" dirty="0">
+              <a:rPr lang="en-US" sz="2000" dirty="0">
                 <a:solidFill>
                   <a:schemeClr val="tx1"/>
                 </a:solidFill>
               </a:rPr>
               <a:t>Om sorken blir färre kan räven äta annat.</a:t>
             </a:r>
-            <a:endParaRPr lang="en-US" sz="2200" dirty="0"/>
+            <a:endParaRPr lang="en-US" sz="2000" dirty="0"/>
           </a:p>
         </p:txBody>
       </p:sp>
@@ -5283,8 +5283,8 @@
         </p:blipFill>
         <p:spPr>
           <a:xfrm>
-            <a:off x="5788152" y="2387582"/>
-            <a:ext cx="5852160" cy="2814357"/>
+            <a:off x="4599432" y="2101748"/>
+            <a:ext cx="7040880" cy="3386023"/>
           </a:xfrm>
           <a:prstGeom prst="rect">
             <a:avLst/>
@@ -5778,7 +5778,7 @@
         <p:spPr>
           <a:xfrm>
             <a:off x="548640" y="1554480"/>
-            <a:ext cx="4782312" cy="4480560"/>
+            <a:ext cx="3593592" cy="4480560"/>
           </a:xfrm>
           <a:prstGeom prst="rect">
             <a:avLst/>
@@ -5798,14 +5798,14 @@
               <a:buChar char="•"/>
             </a:pPr>
             <a:r>
-              <a:rPr lang="en-US" sz="2200" dirty="0">
+              <a:rPr lang="en-US" sz="2000" dirty="0">
                 <a:solidFill>
                   <a:schemeClr val="tx1"/>
                 </a:solidFill>
               </a:rPr>
               <a:t>Försörjande: bär, fisk, virke.</a:t>
             </a:r>
-            <a:endParaRPr lang="en-US" sz="2200" dirty="0"/>
+            <a:endParaRPr lang="en-US" sz="2000" dirty="0"/>
           </a:p>
           <a:p>
             <a:pPr marL="342900" indent="-342900">
@@ -5816,14 +5816,14 @@
               <a:buChar char="•"/>
             </a:pPr>
             <a:r>
-              <a:rPr lang="en-US" sz="2200" dirty="0">
+              <a:rPr lang="en-US" sz="2000" dirty="0">
                 <a:solidFill>
                   <a:schemeClr val="tx1"/>
                 </a:solidFill>
               </a:rPr>
               <a:t>Reglerande: pollinering, vattenrening.</a:t>
             </a:r>
-            <a:endParaRPr lang="en-US" sz="2200" dirty="0"/>
+            <a:endParaRPr lang="en-US" sz="2000" dirty="0"/>
           </a:p>
           <a:p>
             <a:pPr marL="342900" indent="-342900">
@@ -5834,14 +5834,14 @@
               <a:buChar char="•"/>
             </a:pPr>
             <a:r>
-              <a:rPr lang="en-US" sz="2200" dirty="0">
+              <a:rPr lang="en-US" sz="2000" dirty="0">
                 <a:solidFill>
                   <a:schemeClr val="tx1"/>
                 </a:solidFill>
               </a:rPr>
               <a:t>Stödjande: bördig jord, fotosyntes.</a:t>
             </a:r>
-            <a:endParaRPr lang="en-US" sz="2200" dirty="0"/>
+            <a:endParaRPr lang="en-US" sz="2000" dirty="0"/>
           </a:p>
           <a:p>
             <a:pPr marL="342900" indent="-342900">
@@ -5852,14 +5852,14 @@
               <a:buChar char="•"/>
             </a:pPr>
             <a:r>
-              <a:rPr lang="en-US" sz="2200" dirty="0">
+              <a:rPr lang="en-US" sz="2000" dirty="0">
                 <a:solidFill>
                   <a:schemeClr val="tx1"/>
                 </a:solidFill>
               </a:rPr>
               <a:t>Kulturella: friluftsliv, fiske.</a:t>
             </a:r>
-            <a:endParaRPr lang="en-US" sz="2200" dirty="0"/>
+            <a:endParaRPr lang="en-US" sz="2000" dirty="0"/>
           </a:p>
         </p:txBody>
       </p:sp>
@@ -5879,8 +5879,8 @@
         </p:blipFill>
         <p:spPr>
           <a:xfrm>
-            <a:off x="5788152" y="2702357"/>
-            <a:ext cx="5852160" cy="2184806"/>
+            <a:off x="4599432" y="2480462"/>
+            <a:ext cx="7040880" cy="2628595"/>
           </a:xfrm>
           <a:prstGeom prst="rect">
             <a:avLst/>
